--- a/public/presentatie.pptx
+++ b/public/presentatie.pptx
@@ -7,10 +7,6 @@
   <p:sldIdLst>
     <p:sldId id="256" r:id="rId7"/>
     <p:sldId id="257" r:id="rId8"/>
-    <p:sldId id="258" r:id="rId9"/>
-    <p:sldId id="259" r:id="rId10"/>
-    <p:sldId id="260" r:id="rId11"/>
-    <p:sldId id="261" r:id="rId12"/>
   </p:sldIdLst>
   <p:sldSz cx="9144000" cy="5143500" type="screen4x3"/>
   <p:notesSz cx="6858000" cy="9144000"/>
@@ -3212,7 +3208,7 @@
               </a:defRPr>
             </a:pPr>
             <a:r>
-              <a:t>Plastic soep</a:t>
+              <a:t>JJj</a:t>
             </a:r>
           </a:p>
         </p:txBody>
@@ -3248,7 +3244,7 @@
               </a:defRPr>
             </a:pPr>
             <a:r>
-              <a:t>Merijn, Tim, Yassien</a:t>
+              <a:t>jj</a:t>
             </a:r>
           </a:p>
         </p:txBody>
@@ -3457,7 +3453,7 @@
               </a:defRPr>
             </a:pPr>
             <a:r>
-              <a:t>Inhoud</a:t>
+              <a:t>HH</a:t>
             </a:r>
           </a:p>
         </p:txBody>
@@ -3493,978 +3489,8 @@
               </a:defRPr>
             </a:pPr>
             <a:r>
-              <a:t>Inleiding</a:t>
-            </a:r>
-          </a:p>
-          <a:p>
-            <a:pPr algn="l">
-              <a:defRPr sz="2000">
-                <a:solidFill>
-                  <a:srgbClr val="00FFCC"/>
-                </a:solidFill>
-                <a:latin typeface="Arial"/>
-              </a:defRPr>
-            </a:pPr>
-            <a:r>
-              <a:t>Probleem</a:t>
-            </a:r>
-          </a:p>
-          <a:p>
-            <a:pPr algn="l">
-              <a:defRPr sz="2000">
-                <a:solidFill>
-                  <a:srgbClr val="00FFCC"/>
-                </a:solidFill>
-                <a:latin typeface="Arial"/>
-              </a:defRPr>
-            </a:pPr>
-            <a:r>
-              <a:t>Vragen</a:t>
-            </a:r>
-          </a:p>
-        </p:txBody>
-      </p:sp>
-    </p:spTree>
-  </p:cSld>
-  <p:clrMapOvr>
-    <a:masterClrMapping/>
-  </p:clrMapOvr>
-</p:sld>
-</file>
-
-<file path=ppt/slides/slide3.xml><?xml version="1.0" encoding="utf-8"?>
-<p:sld xmlns:a="http://schemas.openxmlformats.org/drawingml/2006/main" xmlns:p="http://schemas.openxmlformats.org/presentationml/2006/main" xmlns:r="http://schemas.openxmlformats.org/officeDocument/2006/relationships">
-  <p:cSld>
-    <p:spTree>
-      <p:nvGrpSpPr>
-        <p:cNvPr id="1" name=""/>
-        <p:cNvGrpSpPr/>
-        <p:nvPr/>
-      </p:nvGrpSpPr>
-      <p:grpSpPr/>
-      <p:sp>
-        <p:nvSpPr>
-          <p:cNvPr id="2" name="Rectangle 1"/>
-          <p:cNvSpPr/>
-          <p:nvPr/>
-        </p:nvSpPr>
-        <p:spPr>
-          <a:xfrm>
-            <a:off x="0" y="0"/>
-            <a:ext cx="9144000" cy="5143500"/>
-          </a:xfrm>
-          <a:prstGeom prst="rect">
-            <a:avLst/>
-          </a:prstGeom>
-          <a:solidFill>
-            <a:srgbClr val="0C0E24"/>
-          </a:solidFill>
-          <a:ln>
-            <a:noFill/>
-          </a:ln>
-        </p:spPr>
-        <p:style>
-          <a:lnRef idx="1">
-            <a:schemeClr val="accent1"/>
-          </a:lnRef>
-          <a:fillRef idx="3">
-            <a:schemeClr val="accent1"/>
-          </a:fillRef>
-          <a:effectRef idx="2">
-            <a:schemeClr val="accent1"/>
-          </a:effectRef>
-          <a:fontRef idx="minor">
-            <a:schemeClr val="lt1"/>
-          </a:fontRef>
-        </p:style>
-        <p:txBody>
-          <a:bodyPr rtlCol="0" anchor="ctr"/>
-          <a:lstStyle/>
-          <a:p>
-            <a:pPr algn="ctr"/>
-          </a:p>
-        </p:txBody>
-      </p:sp>
-      <p:sp>
-        <p:nvSpPr>
-          <p:cNvPr id="3" name="Rectangle 2"/>
-          <p:cNvSpPr/>
-          <p:nvPr/>
-        </p:nvSpPr>
-        <p:spPr>
-          <a:xfrm>
-            <a:off x="0" y="0"/>
-            <a:ext cx="274320" cy="5143500"/>
-          </a:xfrm>
-          <a:prstGeom prst="rect">
-            <a:avLst/>
-          </a:prstGeom>
-          <a:solidFill>
-            <a:srgbClr val="FF0080"/>
-          </a:solidFill>
-          <a:ln>
-            <a:noFill/>
-          </a:ln>
-        </p:spPr>
-        <p:style>
-          <a:lnRef idx="1">
-            <a:schemeClr val="accent1"/>
-          </a:lnRef>
-          <a:fillRef idx="3">
-            <a:schemeClr val="accent1"/>
-          </a:fillRef>
-          <a:effectRef idx="2">
-            <a:schemeClr val="accent1"/>
-          </a:effectRef>
-          <a:fontRef idx="minor">
-            <a:schemeClr val="lt1"/>
-          </a:fontRef>
-        </p:style>
-        <p:txBody>
-          <a:bodyPr rtlCol="0" anchor="ctr"/>
-          <a:lstStyle/>
-          <a:p>
-            <a:pPr algn="ctr"/>
-          </a:p>
-        </p:txBody>
-      </p:sp>
-      <p:sp>
-        <p:nvSpPr>
-          <p:cNvPr id="4" name="Rectangle 3"/>
-          <p:cNvSpPr/>
-          <p:nvPr/>
-        </p:nvSpPr>
-        <p:spPr>
-          <a:xfrm>
-            <a:off x="548640" y="1371600"/>
-            <a:ext cx="4114800" cy="3200400"/>
-          </a:xfrm>
-          <a:prstGeom prst="rect">
-            <a:avLst/>
-          </a:prstGeom>
-          <a:solidFill>
-            <a:srgbClr val="141838"/>
-          </a:solidFill>
-          <a:ln w="19050">
-            <a:solidFill>
-              <a:srgbClr val="00FFCC"/>
-            </a:solidFill>
-          </a:ln>
-        </p:spPr>
-        <p:style>
-          <a:lnRef idx="1">
-            <a:schemeClr val="accent1"/>
-          </a:lnRef>
-          <a:fillRef idx="3">
-            <a:schemeClr val="accent1"/>
-          </a:fillRef>
-          <a:effectRef idx="2">
-            <a:schemeClr val="accent1"/>
-          </a:effectRef>
-          <a:fontRef idx="minor">
-            <a:schemeClr val="lt1"/>
-          </a:fontRef>
-        </p:style>
-        <p:txBody>
-          <a:bodyPr rtlCol="0" anchor="ctr"/>
-          <a:lstStyle/>
-          <a:p>
-            <a:pPr algn="ctr"/>
-          </a:p>
-        </p:txBody>
-      </p:sp>
-      <p:pic>
-        <p:nvPicPr>
-          <p:cNvPr id="5" name="Picture 4" descr="temp_img_3.jpg"/>
-          <p:cNvPicPr>
-            <a:picLocks noChangeAspect="1"/>
-          </p:cNvPicPr>
-          <p:nvPr/>
-        </p:nvPicPr>
-        <p:blipFill>
-          <a:blip r:embed="rId2"/>
-          <a:stretch>
-            <a:fillRect/>
-          </a:stretch>
-        </p:blipFill>
-        <p:spPr>
-          <a:xfrm>
-            <a:off x="5029200" y="1463040"/>
-            <a:ext cx="3474720" cy="3017520"/>
-          </a:xfrm>
-          <a:prstGeom prst="rect">
-            <a:avLst/>
-          </a:prstGeom>
-        </p:spPr>
-      </p:pic>
-      <p:sp>
-        <p:nvSpPr>
-          <p:cNvPr id="6" name="TextBox 5"/>
-          <p:cNvSpPr txBox="1"/>
-          <p:nvPr/>
-        </p:nvSpPr>
-        <p:spPr>
-          <a:xfrm>
-            <a:off x="731520" y="365760"/>
-            <a:ext cx="7772400" cy="914400"/>
-          </a:xfrm>
-          <a:prstGeom prst="rect">
-            <a:avLst/>
-          </a:prstGeom>
-          <a:noFill/>
-        </p:spPr>
-        <p:txBody>
-          <a:bodyPr wrap="none">
-            <a:spAutoFit/>
-          </a:bodyPr>
-          <a:lstStyle/>
-          <a:p>
-            <a:pPr algn="l">
-              <a:defRPr b="1" sz="3800">
-                <a:solidFill>
-                  <a:srgbClr val="00FFCC"/>
-                </a:solidFill>
-                <a:latin typeface="Arial"/>
-              </a:defRPr>
-            </a:pPr>
-            <a:r>
-              <a:t>Inleiding</a:t>
-            </a:r>
-          </a:p>
-        </p:txBody>
-      </p:sp>
-      <p:sp>
-        <p:nvSpPr>
-          <p:cNvPr id="7" name="TextBox 6"/>
-          <p:cNvSpPr txBox="1"/>
-          <p:nvPr/>
-        </p:nvSpPr>
-        <p:spPr>
-          <a:xfrm>
-            <a:off x="731520" y="1645920"/>
-            <a:ext cx="3931920" cy="2926080"/>
-          </a:xfrm>
-          <a:prstGeom prst="rect">
-            <a:avLst/>
-          </a:prstGeom>
-          <a:noFill/>
-        </p:spPr>
-        <p:txBody>
-          <a:bodyPr wrap="square">
-            <a:spAutoFit/>
-          </a:bodyPr>
-          <a:lstStyle/>
-          <a:p>
-            <a:pPr algn="l">
-              <a:defRPr sz="2000">
-                <a:solidFill>
-                  <a:srgbClr val="00FFCC"/>
-                </a:solidFill>
-                <a:latin typeface="Arial"/>
-              </a:defRPr>
-            </a:pPr>
-          </a:p>
-        </p:txBody>
-      </p:sp>
-    </p:spTree>
-  </p:cSld>
-  <p:clrMapOvr>
-    <a:masterClrMapping/>
-  </p:clrMapOvr>
-</p:sld>
-</file>
-
-<file path=ppt/slides/slide4.xml><?xml version="1.0" encoding="utf-8"?>
-<p:sld xmlns:a="http://schemas.openxmlformats.org/drawingml/2006/main" xmlns:p="http://schemas.openxmlformats.org/presentationml/2006/main" xmlns:r="http://schemas.openxmlformats.org/officeDocument/2006/relationships">
-  <p:cSld>
-    <p:spTree>
-      <p:nvGrpSpPr>
-        <p:cNvPr id="1" name=""/>
-        <p:cNvGrpSpPr/>
-        <p:nvPr/>
-      </p:nvGrpSpPr>
-      <p:grpSpPr/>
-      <p:sp>
-        <p:nvSpPr>
-          <p:cNvPr id="2" name="Rectangle 1"/>
-          <p:cNvSpPr/>
-          <p:nvPr/>
-        </p:nvSpPr>
-        <p:spPr>
-          <a:xfrm>
-            <a:off x="0" y="0"/>
-            <a:ext cx="9144000" cy="5143500"/>
-          </a:xfrm>
-          <a:prstGeom prst="rect">
-            <a:avLst/>
-          </a:prstGeom>
-          <a:solidFill>
-            <a:srgbClr val="0C0E24"/>
-          </a:solidFill>
-          <a:ln>
-            <a:noFill/>
-          </a:ln>
-        </p:spPr>
-        <p:style>
-          <a:lnRef idx="1">
-            <a:schemeClr val="accent1"/>
-          </a:lnRef>
-          <a:fillRef idx="3">
-            <a:schemeClr val="accent1"/>
-          </a:fillRef>
-          <a:effectRef idx="2">
-            <a:schemeClr val="accent1"/>
-          </a:effectRef>
-          <a:fontRef idx="minor">
-            <a:schemeClr val="lt1"/>
-          </a:fontRef>
-        </p:style>
-        <p:txBody>
-          <a:bodyPr rtlCol="0" anchor="ctr"/>
-          <a:lstStyle/>
-          <a:p>
-            <a:pPr algn="ctr"/>
-          </a:p>
-        </p:txBody>
-      </p:sp>
-      <p:sp>
-        <p:nvSpPr>
-          <p:cNvPr id="3" name="Rectangle 2"/>
-          <p:cNvSpPr/>
-          <p:nvPr/>
-        </p:nvSpPr>
-        <p:spPr>
-          <a:xfrm>
-            <a:off x="0" y="0"/>
-            <a:ext cx="274320" cy="5143500"/>
-          </a:xfrm>
-          <a:prstGeom prst="rect">
-            <a:avLst/>
-          </a:prstGeom>
-          <a:solidFill>
-            <a:srgbClr val="FF0080"/>
-          </a:solidFill>
-          <a:ln>
-            <a:noFill/>
-          </a:ln>
-        </p:spPr>
-        <p:style>
-          <a:lnRef idx="1">
-            <a:schemeClr val="accent1"/>
-          </a:lnRef>
-          <a:fillRef idx="3">
-            <a:schemeClr val="accent1"/>
-          </a:fillRef>
-          <a:effectRef idx="2">
-            <a:schemeClr val="accent1"/>
-          </a:effectRef>
-          <a:fontRef idx="minor">
-            <a:schemeClr val="lt1"/>
-          </a:fontRef>
-        </p:style>
-        <p:txBody>
-          <a:bodyPr rtlCol="0" anchor="ctr"/>
-          <a:lstStyle/>
-          <a:p>
-            <a:pPr algn="ctr"/>
-          </a:p>
-        </p:txBody>
-      </p:sp>
-      <p:sp>
-        <p:nvSpPr>
-          <p:cNvPr id="4" name="Rectangle 3"/>
-          <p:cNvSpPr/>
-          <p:nvPr/>
-        </p:nvSpPr>
-        <p:spPr>
-          <a:xfrm>
-            <a:off x="548640" y="1371600"/>
-            <a:ext cx="4114800" cy="3200400"/>
-          </a:xfrm>
-          <a:prstGeom prst="rect">
-            <a:avLst/>
-          </a:prstGeom>
-          <a:solidFill>
-            <a:srgbClr val="141838"/>
-          </a:solidFill>
-          <a:ln w="19050">
-            <a:solidFill>
-              <a:srgbClr val="00FFCC"/>
-            </a:solidFill>
-          </a:ln>
-        </p:spPr>
-        <p:style>
-          <a:lnRef idx="1">
-            <a:schemeClr val="accent1"/>
-          </a:lnRef>
-          <a:fillRef idx="3">
-            <a:schemeClr val="accent1"/>
-          </a:fillRef>
-          <a:effectRef idx="2">
-            <a:schemeClr val="accent1"/>
-          </a:effectRef>
-          <a:fontRef idx="minor">
-            <a:schemeClr val="lt1"/>
-          </a:fontRef>
-        </p:style>
-        <p:txBody>
-          <a:bodyPr rtlCol="0" anchor="ctr"/>
-          <a:lstStyle/>
-          <a:p>
-            <a:pPr algn="ctr"/>
-          </a:p>
-        </p:txBody>
-      </p:sp>
-      <p:pic>
-        <p:nvPicPr>
-          <p:cNvPr id="5" name="Picture 4" descr="temp_img_4.jpg"/>
-          <p:cNvPicPr>
-            <a:picLocks noChangeAspect="1"/>
-          </p:cNvPicPr>
-          <p:nvPr/>
-        </p:nvPicPr>
-        <p:blipFill>
-          <a:blip r:embed="rId2"/>
-          <a:stretch>
-            <a:fillRect/>
-          </a:stretch>
-        </p:blipFill>
-        <p:spPr>
-          <a:xfrm>
-            <a:off x="5029200" y="1463040"/>
-            <a:ext cx="3474720" cy="3017520"/>
-          </a:xfrm>
-          <a:prstGeom prst="rect">
-            <a:avLst/>
-          </a:prstGeom>
-        </p:spPr>
-      </p:pic>
-      <p:sp>
-        <p:nvSpPr>
-          <p:cNvPr id="6" name="TextBox 5"/>
-          <p:cNvSpPr txBox="1"/>
-          <p:nvPr/>
-        </p:nvSpPr>
-        <p:spPr>
-          <a:xfrm>
-            <a:off x="731520" y="365760"/>
-            <a:ext cx="7772400" cy="914400"/>
-          </a:xfrm>
-          <a:prstGeom prst="rect">
-            <a:avLst/>
-          </a:prstGeom>
-          <a:noFill/>
-        </p:spPr>
-        <p:txBody>
-          <a:bodyPr wrap="none">
-            <a:spAutoFit/>
-          </a:bodyPr>
-          <a:lstStyle/>
-          <a:p>
-            <a:pPr algn="l">
-              <a:defRPr b="1" sz="3800">
-                <a:solidFill>
-                  <a:srgbClr val="00FFCC"/>
-                </a:solidFill>
-                <a:latin typeface="Arial"/>
-              </a:defRPr>
-            </a:pPr>
-            <a:r>
-              <a:t>Probleem</a:t>
-            </a:r>
-          </a:p>
-        </p:txBody>
-      </p:sp>
-      <p:sp>
-        <p:nvSpPr>
-          <p:cNvPr id="7" name="TextBox 6"/>
-          <p:cNvSpPr txBox="1"/>
-          <p:nvPr/>
-        </p:nvSpPr>
-        <p:spPr>
-          <a:xfrm>
-            <a:off x="731520" y="1645920"/>
-            <a:ext cx="3931920" cy="2926080"/>
-          </a:xfrm>
-          <a:prstGeom prst="rect">
-            <a:avLst/>
-          </a:prstGeom>
-          <a:noFill/>
-        </p:spPr>
-        <p:txBody>
-          <a:bodyPr wrap="square">
-            <a:spAutoFit/>
-          </a:bodyPr>
-          <a:lstStyle/>
-          <a:p>
-            <a:pPr algn="l">
-              <a:defRPr sz="2000">
-                <a:solidFill>
-                  <a:srgbClr val="00FFCC"/>
-                </a:solidFill>
-                <a:latin typeface="Arial"/>
-              </a:defRPr>
-            </a:pPr>
-          </a:p>
-        </p:txBody>
-      </p:sp>
-    </p:spTree>
-  </p:cSld>
-  <p:clrMapOvr>
-    <a:masterClrMapping/>
-  </p:clrMapOvr>
-</p:sld>
-</file>
-
-<file path=ppt/slides/slide5.xml><?xml version="1.0" encoding="utf-8"?>
-<p:sld xmlns:a="http://schemas.openxmlformats.org/drawingml/2006/main" xmlns:p="http://schemas.openxmlformats.org/presentationml/2006/main" xmlns:r="http://schemas.openxmlformats.org/officeDocument/2006/relationships">
-  <p:cSld>
-    <p:spTree>
-      <p:nvGrpSpPr>
-        <p:cNvPr id="1" name=""/>
-        <p:cNvGrpSpPr/>
-        <p:nvPr/>
-      </p:nvGrpSpPr>
-      <p:grpSpPr/>
-      <p:sp>
-        <p:nvSpPr>
-          <p:cNvPr id="2" name="Rectangle 1"/>
-          <p:cNvSpPr/>
-          <p:nvPr/>
-        </p:nvSpPr>
-        <p:spPr>
-          <a:xfrm>
-            <a:off x="0" y="0"/>
-            <a:ext cx="9144000" cy="5143500"/>
-          </a:xfrm>
-          <a:prstGeom prst="rect">
-            <a:avLst/>
-          </a:prstGeom>
-          <a:solidFill>
-            <a:srgbClr val="0C0E24"/>
-          </a:solidFill>
-          <a:ln>
-            <a:noFill/>
-          </a:ln>
-        </p:spPr>
-        <p:style>
-          <a:lnRef idx="1">
-            <a:schemeClr val="accent1"/>
-          </a:lnRef>
-          <a:fillRef idx="3">
-            <a:schemeClr val="accent1"/>
-          </a:fillRef>
-          <a:effectRef idx="2">
-            <a:schemeClr val="accent1"/>
-          </a:effectRef>
-          <a:fontRef idx="minor">
-            <a:schemeClr val="lt1"/>
-          </a:fontRef>
-        </p:style>
-        <p:txBody>
-          <a:bodyPr rtlCol="0" anchor="ctr"/>
-          <a:lstStyle/>
-          <a:p>
-            <a:pPr algn="ctr"/>
-          </a:p>
-        </p:txBody>
-      </p:sp>
-      <p:sp>
-        <p:nvSpPr>
-          <p:cNvPr id="3" name="Rectangle 2"/>
-          <p:cNvSpPr/>
-          <p:nvPr/>
-        </p:nvSpPr>
-        <p:spPr>
-          <a:xfrm>
-            <a:off x="0" y="0"/>
-            <a:ext cx="274320" cy="5143500"/>
-          </a:xfrm>
-          <a:prstGeom prst="rect">
-            <a:avLst/>
-          </a:prstGeom>
-          <a:solidFill>
-            <a:srgbClr val="FF0080"/>
-          </a:solidFill>
-          <a:ln>
-            <a:noFill/>
-          </a:ln>
-        </p:spPr>
-        <p:style>
-          <a:lnRef idx="1">
-            <a:schemeClr val="accent1"/>
-          </a:lnRef>
-          <a:fillRef idx="3">
-            <a:schemeClr val="accent1"/>
-          </a:fillRef>
-          <a:effectRef idx="2">
-            <a:schemeClr val="accent1"/>
-          </a:effectRef>
-          <a:fontRef idx="minor">
-            <a:schemeClr val="lt1"/>
-          </a:fontRef>
-        </p:style>
-        <p:txBody>
-          <a:bodyPr rtlCol="0" anchor="ctr"/>
-          <a:lstStyle/>
-          <a:p>
-            <a:pPr algn="ctr"/>
-          </a:p>
-        </p:txBody>
-      </p:sp>
-      <p:sp>
-        <p:nvSpPr>
-          <p:cNvPr id="4" name="Rectangle 3"/>
-          <p:cNvSpPr/>
-          <p:nvPr/>
-        </p:nvSpPr>
-        <p:spPr>
-          <a:xfrm>
-            <a:off x="548640" y="1371600"/>
-            <a:ext cx="4114800" cy="3200400"/>
-          </a:xfrm>
-          <a:prstGeom prst="rect">
-            <a:avLst/>
-          </a:prstGeom>
-          <a:solidFill>
-            <a:srgbClr val="141838"/>
-          </a:solidFill>
-          <a:ln w="19050">
-            <a:solidFill>
-              <a:srgbClr val="00FFCC"/>
-            </a:solidFill>
-          </a:ln>
-        </p:spPr>
-        <p:style>
-          <a:lnRef idx="1">
-            <a:schemeClr val="accent1"/>
-          </a:lnRef>
-          <a:fillRef idx="3">
-            <a:schemeClr val="accent1"/>
-          </a:fillRef>
-          <a:effectRef idx="2">
-            <a:schemeClr val="accent1"/>
-          </a:effectRef>
-          <a:fontRef idx="minor">
-            <a:schemeClr val="lt1"/>
-          </a:fontRef>
-        </p:style>
-        <p:txBody>
-          <a:bodyPr rtlCol="0" anchor="ctr"/>
-          <a:lstStyle/>
-          <a:p>
-            <a:pPr algn="ctr"/>
-          </a:p>
-        </p:txBody>
-      </p:sp>
-      <p:pic>
-        <p:nvPicPr>
-          <p:cNvPr id="5" name="Picture 4" descr="temp_img_5.jpg"/>
-          <p:cNvPicPr>
-            <a:picLocks noChangeAspect="1"/>
-          </p:cNvPicPr>
-          <p:nvPr/>
-        </p:nvPicPr>
-        <p:blipFill>
-          <a:blip r:embed="rId2"/>
-          <a:stretch>
-            <a:fillRect/>
-          </a:stretch>
-        </p:blipFill>
-        <p:spPr>
-          <a:xfrm>
-            <a:off x="5029200" y="1463040"/>
-            <a:ext cx="3474720" cy="3017520"/>
-          </a:xfrm>
-          <a:prstGeom prst="rect">
-            <a:avLst/>
-          </a:prstGeom>
-        </p:spPr>
-      </p:pic>
-      <p:sp>
-        <p:nvSpPr>
-          <p:cNvPr id="6" name="TextBox 5"/>
-          <p:cNvSpPr txBox="1"/>
-          <p:nvPr/>
-        </p:nvSpPr>
-        <p:spPr>
-          <a:xfrm>
-            <a:off x="731520" y="365760"/>
-            <a:ext cx="7772400" cy="914400"/>
-          </a:xfrm>
-          <a:prstGeom prst="rect">
-            <a:avLst/>
-          </a:prstGeom>
-          <a:noFill/>
-        </p:spPr>
-        <p:txBody>
-          <a:bodyPr wrap="none">
-            <a:spAutoFit/>
-          </a:bodyPr>
-          <a:lstStyle/>
-          <a:p>
-            <a:pPr algn="l">
-              <a:defRPr b="1" sz="3800">
-                <a:solidFill>
-                  <a:srgbClr val="00FFCC"/>
-                </a:solidFill>
-                <a:latin typeface="Arial"/>
-              </a:defRPr>
-            </a:pPr>
-            <a:r>
-              <a:t>Vragen</a:t>
-            </a:r>
-          </a:p>
-        </p:txBody>
-      </p:sp>
-      <p:sp>
-        <p:nvSpPr>
-          <p:cNvPr id="7" name="TextBox 6"/>
-          <p:cNvSpPr txBox="1"/>
-          <p:nvPr/>
-        </p:nvSpPr>
-        <p:spPr>
-          <a:xfrm>
-            <a:off x="731520" y="1645920"/>
-            <a:ext cx="3931920" cy="2926080"/>
-          </a:xfrm>
-          <a:prstGeom prst="rect">
-            <a:avLst/>
-          </a:prstGeom>
-          <a:noFill/>
-        </p:spPr>
-        <p:txBody>
-          <a:bodyPr wrap="square">
-            <a:spAutoFit/>
-          </a:bodyPr>
-          <a:lstStyle/>
-          <a:p>
-            <a:pPr algn="l">
-              <a:defRPr sz="2000">
-                <a:solidFill>
-                  <a:srgbClr val="00FFCC"/>
-                </a:solidFill>
-                <a:latin typeface="Arial"/>
-              </a:defRPr>
-            </a:pPr>
-          </a:p>
-        </p:txBody>
-      </p:sp>
-    </p:spTree>
-  </p:cSld>
-  <p:clrMapOvr>
-    <a:masterClrMapping/>
-  </p:clrMapOvr>
-</p:sld>
-</file>
-
-<file path=ppt/slides/slide6.xml><?xml version="1.0" encoding="utf-8"?>
-<p:sld xmlns:a="http://schemas.openxmlformats.org/drawingml/2006/main" xmlns:p="http://schemas.openxmlformats.org/presentationml/2006/main" xmlns:r="http://schemas.openxmlformats.org/officeDocument/2006/relationships">
-  <p:cSld>
-    <p:spTree>
-      <p:nvGrpSpPr>
-        <p:cNvPr id="1" name=""/>
-        <p:cNvGrpSpPr/>
-        <p:nvPr/>
-      </p:nvGrpSpPr>
-      <p:grpSpPr/>
-      <p:sp>
-        <p:nvSpPr>
-          <p:cNvPr id="2" name="Rectangle 1"/>
-          <p:cNvSpPr/>
-          <p:nvPr/>
-        </p:nvSpPr>
-        <p:spPr>
-          <a:xfrm>
-            <a:off x="0" y="0"/>
-            <a:ext cx="9144000" cy="5143500"/>
-          </a:xfrm>
-          <a:prstGeom prst="rect">
-            <a:avLst/>
-          </a:prstGeom>
-          <a:solidFill>
-            <a:srgbClr val="0C0E24"/>
-          </a:solidFill>
-          <a:ln>
-            <a:noFill/>
-          </a:ln>
-        </p:spPr>
-        <p:style>
-          <a:lnRef idx="1">
-            <a:schemeClr val="accent1"/>
-          </a:lnRef>
-          <a:fillRef idx="3">
-            <a:schemeClr val="accent1"/>
-          </a:fillRef>
-          <a:effectRef idx="2">
-            <a:schemeClr val="accent1"/>
-          </a:effectRef>
-          <a:fontRef idx="minor">
-            <a:schemeClr val="lt1"/>
-          </a:fontRef>
-        </p:style>
-        <p:txBody>
-          <a:bodyPr rtlCol="0" anchor="ctr"/>
-          <a:lstStyle/>
-          <a:p>
-            <a:pPr algn="ctr"/>
-          </a:p>
-        </p:txBody>
-      </p:sp>
-      <p:sp>
-        <p:nvSpPr>
-          <p:cNvPr id="3" name="Rectangle 2"/>
-          <p:cNvSpPr/>
-          <p:nvPr/>
-        </p:nvSpPr>
-        <p:spPr>
-          <a:xfrm>
-            <a:off x="0" y="0"/>
-            <a:ext cx="274320" cy="5143500"/>
-          </a:xfrm>
-          <a:prstGeom prst="rect">
-            <a:avLst/>
-          </a:prstGeom>
-          <a:solidFill>
-            <a:srgbClr val="FF0080"/>
-          </a:solidFill>
-          <a:ln>
-            <a:noFill/>
-          </a:ln>
-        </p:spPr>
-        <p:style>
-          <a:lnRef idx="1">
-            <a:schemeClr val="accent1"/>
-          </a:lnRef>
-          <a:fillRef idx="3">
-            <a:schemeClr val="accent1"/>
-          </a:fillRef>
-          <a:effectRef idx="2">
-            <a:schemeClr val="accent1"/>
-          </a:effectRef>
-          <a:fontRef idx="minor">
-            <a:schemeClr val="lt1"/>
-          </a:fontRef>
-        </p:style>
-        <p:txBody>
-          <a:bodyPr rtlCol="0" anchor="ctr"/>
-          <a:lstStyle/>
-          <a:p>
-            <a:pPr algn="ctr"/>
-          </a:p>
-        </p:txBody>
-      </p:sp>
-      <p:sp>
-        <p:nvSpPr>
-          <p:cNvPr id="4" name="Rectangle 3"/>
-          <p:cNvSpPr/>
-          <p:nvPr/>
-        </p:nvSpPr>
-        <p:spPr>
-          <a:xfrm>
-            <a:off x="548640" y="1371600"/>
-            <a:ext cx="8046720" cy="3200400"/>
-          </a:xfrm>
-          <a:prstGeom prst="rect">
-            <a:avLst/>
-          </a:prstGeom>
-          <a:solidFill>
-            <a:srgbClr val="141838"/>
-          </a:solidFill>
-          <a:ln w="19050">
-            <a:solidFill>
-              <a:srgbClr val="00FFCC"/>
-            </a:solidFill>
-          </a:ln>
-        </p:spPr>
-        <p:style>
-          <a:lnRef idx="1">
-            <a:schemeClr val="accent1"/>
-          </a:lnRef>
-          <a:fillRef idx="3">
-            <a:schemeClr val="accent1"/>
-          </a:fillRef>
-          <a:effectRef idx="2">
-            <a:schemeClr val="accent1"/>
-          </a:effectRef>
-          <a:fontRef idx="minor">
-            <a:schemeClr val="lt1"/>
-          </a:fontRef>
-        </p:style>
-        <p:txBody>
-          <a:bodyPr rtlCol="0" anchor="ctr"/>
-          <a:lstStyle/>
-          <a:p>
-            <a:pPr algn="ctr"/>
-          </a:p>
-        </p:txBody>
-      </p:sp>
-      <p:sp>
-        <p:nvSpPr>
-          <p:cNvPr id="5" name="TextBox 4"/>
-          <p:cNvSpPr txBox="1"/>
-          <p:nvPr/>
-        </p:nvSpPr>
-        <p:spPr>
-          <a:xfrm>
-            <a:off x="731520" y="365760"/>
-            <a:ext cx="7772400" cy="914400"/>
-          </a:xfrm>
-          <a:prstGeom prst="rect">
-            <a:avLst/>
-          </a:prstGeom>
-          <a:noFill/>
-        </p:spPr>
-        <p:txBody>
-          <a:bodyPr wrap="none">
-            <a:spAutoFit/>
-          </a:bodyPr>
-          <a:lstStyle/>
-          <a:p>
-            <a:pPr algn="l">
-              <a:defRPr b="1" sz="3800">
-                <a:solidFill>
-                  <a:srgbClr val="00FFCC"/>
-                </a:solidFill>
-                <a:latin typeface="Arial"/>
-              </a:defRPr>
-            </a:pPr>
-            <a:r>
-              <a:t>Geen titel</a:t>
-            </a:r>
-          </a:p>
-        </p:txBody>
-      </p:sp>
-      <p:sp>
-        <p:nvSpPr>
-          <p:cNvPr id="6" name="TextBox 5"/>
-          <p:cNvSpPr txBox="1"/>
-          <p:nvPr/>
-        </p:nvSpPr>
-        <p:spPr>
-          <a:xfrm>
-            <a:off x="731520" y="1645920"/>
-            <a:ext cx="7772400" cy="2926080"/>
-          </a:xfrm>
-          <a:prstGeom prst="rect">
-            <a:avLst/>
-          </a:prstGeom>
-          <a:noFill/>
-        </p:spPr>
-        <p:txBody>
-          <a:bodyPr wrap="square">
-            <a:spAutoFit/>
-          </a:bodyPr>
-          <a:lstStyle/>
-          <a:p>
-            <a:pPr algn="l">
-              <a:defRPr sz="2000">
-                <a:solidFill>
-                  <a:srgbClr val="00FFCC"/>
-                </a:solidFill>
-                <a:latin typeface="Arial"/>
-              </a:defRPr>
-            </a:pPr>
+              <a:t>fff</a:t>
+            </a:r>
           </a:p>
         </p:txBody>
       </p:sp>
